--- a/assets/pptx/catalog-419.pptx
+++ b/assets/pptx/catalog-419.pptx
@@ -3304,7 +3304,7 @@
                 <a:ea typeface="Ebrima"/>
                 <a:cs typeface="Ebrima"/>
               </a:rPr>
-              <a:t>አክብሩት ከእኔ ጋራ (2x)</a:t>
+              <a:t>አክብሩት ከእኔ ጋራ 2x</a:t>
             </a:r>
           </a:p>
         </p:txBody>
@@ -3425,7 +3425,7 @@
                 <a:ea typeface="Ebrima"/>
                 <a:cs typeface="Ebrima"/>
               </a:rPr>
-              <a:t>የታል ጭብጨባ መቅደሱ የሚገባ (2x)</a:t>
+              <a:t>የታል ጭብጨባ መቅደሱ የሚገባ 2x</a:t>
             </a:r>
           </a:p>
         </p:txBody>
@@ -3824,7 +3824,7 @@
                 <a:ea typeface="Ebrima"/>
                 <a:cs typeface="Ebrima"/>
               </a:rPr>
-              <a:t>ጌታዬ ተነሳ (2x)</a:t>
+              <a:t>ጌታዬ ተነሳ 2x</a:t>
             </a:r>
           </a:p>
         </p:txBody>
@@ -3927,7 +3927,7 @@
                 <a:ea typeface="Ebrima"/>
                 <a:cs typeface="Ebrima"/>
               </a:rPr>
-              <a:t>ኢየሱስ ተነስቷል ልመስክረው (2x)</a:t>
+              <a:t>ኢየሱስ ተነስቷል ልመስክረው 2x</a:t>
             </a:r>
           </a:p>
         </p:txBody>
@@ -4048,7 +4048,7 @@
                 <a:ea typeface="Ebrima"/>
                 <a:cs typeface="Ebrima"/>
               </a:rPr>
-              <a:t>አክብሩት ከእኔ ጋራ (2x)</a:t>
+              <a:t>አክብሩት ከእኔ ጋራ 2x</a:t>
             </a:r>
           </a:p>
         </p:txBody>
@@ -4169,7 +4169,7 @@
                 <a:ea typeface="Ebrima"/>
                 <a:cs typeface="Ebrima"/>
               </a:rPr>
-              <a:t>የታል ጭብጨባ መቅደስ የሚገባ (2x)</a:t>
+              <a:t>የታል ጭብጨባ መቅደስ የሚገባ 2x</a:t>
             </a:r>
           </a:p>
         </p:txBody>
@@ -4380,7 +4380,7 @@
                 <a:ea typeface="Ebrima"/>
                 <a:cs typeface="Ebrima"/>
               </a:rPr>
-              <a:t>ኢየሱስ ተነሳ ጌታየ ተነሳ(2×)</a:t>
+              <a:t>ኢየሱስ ተነሳ ጌታየ ተነሳ2×</a:t>
             </a:r>
           </a:p>
         </p:txBody>
@@ -4483,7 +4483,7 @@
                 <a:ea typeface="Ebrima"/>
                 <a:cs typeface="Ebrima"/>
               </a:rPr>
-              <a:t>ኢየሱስ ተነስቷል ልመስክረው (2x)</a:t>
+              <a:t>ኢየሱስ ተነስቷል ልመስክረው 2x</a:t>
             </a:r>
           </a:p>
         </p:txBody>
